--- a/Proifling and Optimisation in Python Slides.pptx
+++ b/Proifling and Optimisation in Python Slides.pptx
@@ -135,81 +135,45 @@
 </p:presentation>
 </file>
 
-<file path=ppt/revisionInfo.xml><?xml version="1.0" encoding="utf-8"?>
-<p1510:revInfo xmlns:a="http://schemas.openxmlformats.org/drawingml/2006/main" xmlns:r="http://schemas.openxmlformats.org/officeDocument/2006/relationships" xmlns:p1510="http://schemas.microsoft.com/office/powerpoint/2015/10/main">
-  <p1510:revLst>
-    <p1510:client id="{3D377327-C700-4767-BF9F-33F523DF7EF1}" v="2" dt="2025-10-24T08:53:50.826"/>
-  </p1510:revLst>
-</p1510:revInfo>
-</file>
-
 <file path=ppt/changesInfos/changesInfo1.xml><?xml version="1.0" encoding="utf-8"?>
 <pc:chgInfo xmlns:a="http://schemas.openxmlformats.org/drawingml/2006/main" xmlns:r="http://schemas.openxmlformats.org/officeDocument/2006/relationships" xmlns:ac="http://schemas.microsoft.com/office/drawing/2013/main/command" xmlns:pc="http://schemas.microsoft.com/office/powerpoint/2013/main/command">
   <pc:docChgLst>
-    <pc:chgData name="Cooling, Chris" userId="6dcf99c9-2ba5-410a-8445-0893a3d1421f" providerId="ADAL" clId="{C2F9924A-84FC-4DC7-84BD-E956D321B824}"/>
-    <pc:docChg chg="custSel addSld delSld modSld">
-      <pc:chgData name="Cooling, Chris" userId="6dcf99c9-2ba5-410a-8445-0893a3d1421f" providerId="ADAL" clId="{C2F9924A-84FC-4DC7-84BD-E956D321B824}" dt="2024-11-11T15:06:04.913" v="541" actId="20577"/>
+    <pc:chgData name="Cooling, Chris" userId="6dcf99c9-2ba5-410a-8445-0893a3d1421f" providerId="ADAL" clId="{0564427D-CD1D-4B33-9C97-2A8069F97102}"/>
+    <pc:docChg chg="custSel modSld">
+      <pc:chgData name="Cooling, Chris" userId="6dcf99c9-2ba5-410a-8445-0893a3d1421f" providerId="ADAL" clId="{0564427D-CD1D-4B33-9C97-2A8069F97102}" dt="2026-10-09T10:12:06.858" v="5" actId="14100"/>
       <pc:docMkLst>
         <pc:docMk/>
       </pc:docMkLst>
-      <pc:sldChg chg="del">
-        <pc:chgData name="Cooling, Chris" userId="6dcf99c9-2ba5-410a-8445-0893a3d1421f" providerId="ADAL" clId="{C2F9924A-84FC-4DC7-84BD-E956D321B824}" dt="2024-11-11T14:52:51.781" v="84" actId="47"/>
-        <pc:sldMkLst>
-          <pc:docMk/>
-          <pc:sldMk cId="3212729572" sldId="323"/>
-        </pc:sldMkLst>
-      </pc:sldChg>
-      <pc:sldChg chg="modSp add mod">
-        <pc:chgData name="Cooling, Chris" userId="6dcf99c9-2ba5-410a-8445-0893a3d1421f" providerId="ADAL" clId="{C2F9924A-84FC-4DC7-84BD-E956D321B824}" dt="2024-11-11T14:51:05.241" v="83" actId="20577"/>
-        <pc:sldMkLst>
-          <pc:docMk/>
-          <pc:sldMk cId="3528320225" sldId="325"/>
-        </pc:sldMkLst>
-      </pc:sldChg>
-      <pc:sldChg chg="modSp mod">
-        <pc:chgData name="Cooling, Chris" userId="6dcf99c9-2ba5-410a-8445-0893a3d1421f" providerId="ADAL" clId="{C2F9924A-84FC-4DC7-84BD-E956D321B824}" dt="2024-11-11T14:55:10.381" v="98" actId="20577"/>
-        <pc:sldMkLst>
-          <pc:docMk/>
-          <pc:sldMk cId="16407505" sldId="361"/>
-        </pc:sldMkLst>
-      </pc:sldChg>
-      <pc:sldChg chg="modSp mod">
-        <pc:chgData name="Cooling, Chris" userId="6dcf99c9-2ba5-410a-8445-0893a3d1421f" providerId="ADAL" clId="{C2F9924A-84FC-4DC7-84BD-E956D321B824}" dt="2024-11-11T15:06:04.913" v="541" actId="20577"/>
-        <pc:sldMkLst>
-          <pc:docMk/>
-          <pc:sldMk cId="4288594215" sldId="407"/>
-        </pc:sldMkLst>
-      </pc:sldChg>
-    </pc:docChg>
-  </pc:docChgLst>
-  <pc:docChgLst>
-    <pc:chgData name="Cooling, Chris" userId="6dcf99c9-2ba5-410a-8445-0893a3d1421f" providerId="ADAL" clId="{3D377327-C700-4767-BF9F-33F523DF7EF1}"/>
-    <pc:docChg chg="delSld modSld">
-      <pc:chgData name="Cooling, Chris" userId="6dcf99c9-2ba5-410a-8445-0893a3d1421f" providerId="ADAL" clId="{3D377327-C700-4767-BF9F-33F523DF7EF1}" dt="2025-10-24T10:08:49.487" v="2" actId="47"/>
-      <pc:docMkLst>
-        <pc:docMk/>
-      </pc:docMkLst>
-      <pc:sldChg chg="modSp mod">
-        <pc:chgData name="Cooling, Chris" userId="6dcf99c9-2ba5-410a-8445-0893a3d1421f" providerId="ADAL" clId="{3D377327-C700-4767-BF9F-33F523DF7EF1}" dt="2025-10-24T08:53:50.822" v="1" actId="20577"/>
+      <pc:sldChg chg="addSp delSp modSp mod">
+        <pc:chgData name="Cooling, Chris" userId="6dcf99c9-2ba5-410a-8445-0893a3d1421f" providerId="ADAL" clId="{0564427D-CD1D-4B33-9C97-2A8069F97102}" dt="2026-10-09T10:12:06.858" v="5" actId="14100"/>
         <pc:sldMkLst>
           <pc:docMk/>
           <pc:sldMk cId="1507190070" sldId="359"/>
         </pc:sldMkLst>
         <pc:spChg chg="mod">
-          <ac:chgData name="Cooling, Chris" userId="6dcf99c9-2ba5-410a-8445-0893a3d1421f" providerId="ADAL" clId="{3D377327-C700-4767-BF9F-33F523DF7EF1}" dt="2025-10-24T08:53:50.822" v="1" actId="20577"/>
+          <ac:chgData name="Cooling, Chris" userId="6dcf99c9-2ba5-410a-8445-0893a3d1421f" providerId="ADAL" clId="{0564427D-CD1D-4B33-9C97-2A8069F97102}" dt="2026-10-09T10:11:35.108" v="1" actId="20577"/>
           <ac:spMkLst>
             <pc:docMk/>
             <pc:sldMk cId="1507190070" sldId="359"/>
             <ac:spMk id="6" creationId="{F67B57BE-29B8-B7BA-15CB-930F83F6EB26}"/>
           </ac:spMkLst>
         </pc:spChg>
-      </pc:sldChg>
-      <pc:sldChg chg="del">
-        <pc:chgData name="Cooling, Chris" userId="6dcf99c9-2ba5-410a-8445-0893a3d1421f" providerId="ADAL" clId="{3D377327-C700-4767-BF9F-33F523DF7EF1}" dt="2025-10-24T10:08:49.487" v="2" actId="47"/>
-        <pc:sldMkLst>
-          <pc:docMk/>
-          <pc:sldMk cId="3543295302" sldId="406"/>
-        </pc:sldMkLst>
+        <pc:picChg chg="add mod">
+          <ac:chgData name="Cooling, Chris" userId="6dcf99c9-2ba5-410a-8445-0893a3d1421f" providerId="ADAL" clId="{0564427D-CD1D-4B33-9C97-2A8069F97102}" dt="2026-10-09T10:12:06.858" v="5" actId="14100"/>
+          <ac:picMkLst>
+            <pc:docMk/>
+            <pc:sldMk cId="1507190070" sldId="359"/>
+            <ac:picMk id="5" creationId="{F0AE690E-1C15-9EE4-489B-47174A7853A6}"/>
+          </ac:picMkLst>
+        </pc:picChg>
+        <pc:picChg chg="del">
+          <ac:chgData name="Cooling, Chris" userId="6dcf99c9-2ba5-410a-8445-0893a3d1421f" providerId="ADAL" clId="{0564427D-CD1D-4B33-9C97-2A8069F97102}" dt="2026-10-09T10:11:30.184" v="0" actId="478"/>
+          <ac:picMkLst>
+            <pc:docMk/>
+            <pc:sldMk cId="1507190070" sldId="359"/>
+            <ac:picMk id="10" creationId="{8DB0FD8D-5DA8-6F79-6B1A-9EDD19CA97C2}"/>
+          </ac:picMkLst>
+        </pc:picChg>
       </pc:sldChg>
     </pc:docChg>
   </pc:docChgLst>
@@ -298,7 +262,7 @@
           <a:p>
             <a:fld id="{D2E0D2A8-8F95-47C2-ABE1-A779F5A43C98}" type="datetimeFigureOut">
               <a:rPr lang="en-US" smtClean="0"/>
-              <a:t>10/24/2025</a:t>
+              <a:t>10/9/2026</a:t>
             </a:fld>
             <a:endParaRPr lang="en-US"/>
           </a:p>
@@ -1201,7 +1165,7 @@
           <a:p>
             <a:fld id="{144556B2-9E7B-4DD1-B53F-BB328EB36A1F}" type="datetime1">
               <a:rPr lang="en-GB" smtClean="0"/>
-              <a:t>24/10/2025</a:t>
+              <a:t>09/10/2026</a:t>
             </a:fld>
             <a:endParaRPr lang="en-GB"/>
           </a:p>
@@ -1527,7 +1491,7 @@
           <a:p>
             <a:fld id="{906C2A8C-F90B-4C12-AADA-247BEB926B15}" type="datetime1">
               <a:rPr lang="en-GB" smtClean="0"/>
-              <a:t>24/10/2025</a:t>
+              <a:t>09/10/2026</a:t>
             </a:fld>
             <a:endParaRPr lang="en-GB"/>
           </a:p>
@@ -1855,7 +1819,7 @@
           <a:p>
             <a:fld id="{21752478-8F6C-4F13-8BA1-32C720EA751C}" type="datetime1">
               <a:rPr lang="en-GB" smtClean="0"/>
-              <a:t>24/10/2025</a:t>
+              <a:t>09/10/2026</a:t>
             </a:fld>
             <a:endParaRPr lang="en-GB"/>
           </a:p>
@@ -2231,7 +2195,7 @@
           <a:p>
             <a:fld id="{8FE32413-1876-4628-B0D5-C346ECACF472}" type="datetime1">
               <a:rPr lang="en-GB" smtClean="0"/>
-              <a:t>24/10/2025</a:t>
+              <a:t>09/10/2026</a:t>
             </a:fld>
             <a:endParaRPr lang="en-GB"/>
           </a:p>
@@ -2615,7 +2579,7 @@
           <a:p>
             <a:fld id="{1C9FEF1C-5E68-4FB8-AFE3-BC8A29D5EBF6}" type="datetime1">
               <a:rPr lang="en-GB" smtClean="0"/>
-              <a:t>24/10/2025</a:t>
+              <a:t>09/10/2026</a:t>
             </a:fld>
             <a:endParaRPr lang="en-GB"/>
           </a:p>
@@ -3001,7 +2965,7 @@
           <a:p>
             <a:fld id="{9859795F-3540-4CC9-A192-70D4583AC46E}" type="datetime1">
               <a:rPr lang="en-GB" smtClean="0"/>
-              <a:t>24/10/2025</a:t>
+              <a:t>09/10/2026</a:t>
             </a:fld>
             <a:endParaRPr lang="en-GB"/>
           </a:p>
@@ -3229,7 +3193,7 @@
           <a:p>
             <a:fld id="{75872C1E-CC1E-4E8A-A314-98659A61041E}" type="datetime1">
               <a:rPr lang="en-GB" smtClean="0"/>
-              <a:t>24/10/2025</a:t>
+              <a:t>09/10/2026</a:t>
             </a:fld>
             <a:endParaRPr lang="en-GB"/>
           </a:p>
@@ -3727,7 +3691,7 @@
           <a:p>
             <a:fld id="{1E40D540-E981-4608-9A77-55650E032376}" type="datetime1">
               <a:rPr lang="en-GB" smtClean="0"/>
-              <a:t>24/10/2025</a:t>
+              <a:t>09/10/2026</a:t>
             </a:fld>
             <a:endParaRPr lang="en-GB"/>
           </a:p>
@@ -4227,7 +4191,7 @@
           <a:p>
             <a:fld id="{AA7781DD-725D-4685-A585-2BC5DC856066}" type="datetime1">
               <a:rPr lang="en-GB" smtClean="0"/>
-              <a:t>24/10/2025</a:t>
+              <a:t>09/10/2026</a:t>
             </a:fld>
             <a:endParaRPr lang="en-GB"/>
           </a:p>
@@ -4717,7 +4681,7 @@
           <a:p>
             <a:fld id="{D76E72CE-B9B3-4FBD-9701-E7554343598F}" type="datetime1">
               <a:rPr lang="en-GB" smtClean="0"/>
-              <a:t>24/10/2025</a:t>
+              <a:t>09/10/2026</a:t>
             </a:fld>
             <a:endParaRPr lang="en-GB"/>
           </a:p>
@@ -5528,7 +5492,7 @@
           <a:p>
             <a:fld id="{011F2B13-1A41-47C3-AC4E-67D21CB34247}" type="datetime1">
               <a:rPr lang="en-GB" smtClean="0"/>
-              <a:t>24/10/2025</a:t>
+              <a:t>09/10/2026</a:t>
             </a:fld>
             <a:endParaRPr lang="en-GB"/>
           </a:p>
@@ -6145,7 +6109,7 @@
           <a:p>
             <a:fld id="{C254FBEC-7281-43CD-851C-F86929741A10}" type="datetime1">
               <a:rPr lang="en-GB" smtClean="0"/>
-              <a:t>24/10/2025</a:t>
+              <a:t>09/10/2026</a:t>
             </a:fld>
             <a:endParaRPr lang="en-GB"/>
           </a:p>
@@ -6765,7 +6729,7 @@
           <a:p>
             <a:fld id="{D1ED752B-5523-4036-A789-A22ED8DD1B5C}" type="datetime1">
               <a:rPr lang="en-GB" smtClean="0"/>
-              <a:t>24/10/2025</a:t>
+              <a:t>09/10/2026</a:t>
             </a:fld>
             <a:endParaRPr lang="en-GB"/>
           </a:p>
@@ -6936,7 +6900,7 @@
           <a:p>
             <a:fld id="{7E279D85-BDED-42AD-A643-8D6E061634CD}" type="datetime1">
               <a:rPr lang="en-GB" smtClean="0"/>
-              <a:t>24/10/2025</a:t>
+              <a:t>09/10/2026</a:t>
             </a:fld>
             <a:endParaRPr lang="en-GB"/>
           </a:p>
@@ -7109,7 +7073,7 @@
           <a:p>
             <a:fld id="{1EE8784A-32A8-4354-A076-C6BE94AC474E}" type="datetime1">
               <a:rPr lang="en-GB" smtClean="0"/>
-              <a:t>24/10/2025</a:t>
+              <a:t>09/10/2026</a:t>
             </a:fld>
             <a:endParaRPr lang="en-GB"/>
           </a:p>
@@ -7288,7 +7252,7 @@
           <a:p>
             <a:fld id="{383AAFB6-FC82-4A75-8FDF-4734E69327DA}" type="datetime1">
               <a:rPr lang="en-GB" smtClean="0"/>
-              <a:t>24/10/2025</a:t>
+              <a:t>09/10/2026</a:t>
             </a:fld>
             <a:endParaRPr lang="en-GB" dirty="0"/>
           </a:p>
@@ -7482,7 +7446,7 @@
           <a:p>
             <a:fld id="{E914710D-BE75-418E-ABBB-45878B67AD44}" type="datetime1">
               <a:rPr lang="en-GB" smtClean="0"/>
-              <a:t>24/10/2025</a:t>
+              <a:t>09/10/2026</a:t>
             </a:fld>
             <a:endParaRPr lang="en-GB" dirty="0"/>
           </a:p>
@@ -7762,7 +7726,7 @@
           <a:p>
             <a:fld id="{8060A021-78E8-47A4-A73E-2B2314128FBE}" type="datetime1">
               <a:rPr lang="en-GB" smtClean="0"/>
-              <a:t>24/10/2025</a:t>
+              <a:t>09/10/2026</a:t>
             </a:fld>
             <a:endParaRPr lang="en-GB" dirty="0"/>
           </a:p>
@@ -8043,7 +8007,7 @@
           <a:p>
             <a:fld id="{75B5695D-4178-4673-A4FE-7EAAD1B1708B}" type="datetime1">
               <a:rPr lang="en-GB" smtClean="0"/>
-              <a:t>24/10/2025</a:t>
+              <a:t>09/10/2026</a:t>
             </a:fld>
             <a:endParaRPr lang="en-GB" dirty="0"/>
           </a:p>
@@ -8323,7 +8287,7 @@
           <a:p>
             <a:fld id="{3C143D9A-8FB5-48FD-83A8-562C329F7858}" type="datetime1">
               <a:rPr lang="en-GB" smtClean="0"/>
-              <a:t>24/10/2025</a:t>
+              <a:t>09/10/2026</a:t>
             </a:fld>
             <a:endParaRPr lang="en-GB" dirty="0"/>
           </a:p>
@@ -8799,7 +8763,7 @@
           <a:p>
             <a:fld id="{62E00602-F867-4515-8B76-3C9CF9AA0EF5}" type="datetime1">
               <a:rPr lang="en-GB" smtClean="0"/>
-              <a:t>24/10/2025</a:t>
+              <a:t>09/10/2026</a:t>
             </a:fld>
             <a:endParaRPr lang="en-GB" dirty="0"/>
           </a:p>
@@ -9079,7 +9043,7 @@
           <a:p>
             <a:fld id="{380A48BA-6237-4BFF-8262-3D37E24BED8E}" type="datetime1">
               <a:rPr lang="en-GB" smtClean="0"/>
-              <a:t>24/10/2025</a:t>
+              <a:t>09/10/2026</a:t>
             </a:fld>
             <a:endParaRPr lang="en-GB" dirty="0"/>
           </a:p>
@@ -9359,7 +9323,7 @@
           <a:p>
             <a:fld id="{EB7350C9-1920-4F55-A8D4-58185D2A1D95}" type="datetime1">
               <a:rPr lang="en-GB" smtClean="0"/>
-              <a:t>24/10/2025</a:t>
+              <a:t>09/10/2026</a:t>
             </a:fld>
             <a:endParaRPr lang="en-GB" dirty="0"/>
           </a:p>
@@ -9623,7 +9587,7 @@
           <a:p>
             <a:fld id="{C1415A19-BB42-4FDD-B81B-0CBA36493BD3}" type="datetime1">
               <a:rPr lang="en-GB" smtClean="0"/>
-              <a:t>24/10/2025</a:t>
+              <a:t>09/10/2026</a:t>
             </a:fld>
             <a:endParaRPr lang="en-GB"/>
           </a:p>
@@ -10011,7 +9975,7 @@
           <a:p>
             <a:fld id="{33790C23-6829-4C40-BA6B-29852F5E68AC}" type="datetime1">
               <a:rPr lang="en-GB" smtClean="0"/>
-              <a:t>24/10/2025</a:t>
+              <a:t>09/10/2026</a:t>
             </a:fld>
             <a:endParaRPr lang="en-GB"/>
           </a:p>
@@ -10393,7 +10357,7 @@
           <a:p>
             <a:fld id="{9DB28AEA-3C8F-49D3-8B33-71DC80046E19}" type="datetime1">
               <a:rPr lang="en-GB" smtClean="0"/>
-              <a:t>24/10/2025</a:t>
+              <a:t>09/10/2026</a:t>
             </a:fld>
             <a:endParaRPr lang="en-GB"/>
           </a:p>
@@ -10765,7 +10729,7 @@
           <a:p>
             <a:fld id="{95A7733A-4A95-4DEE-962A-AED74667DF75}" type="datetime1">
               <a:rPr lang="en-GB" smtClean="0"/>
-              <a:t>24/10/2025</a:t>
+              <a:t>09/10/2026</a:t>
             </a:fld>
             <a:endParaRPr lang="en-GB"/>
           </a:p>
@@ -11172,7 +11136,7 @@
           <a:p>
             <a:fld id="{271C05C5-A3F6-4086-8481-A17A3A41755B}" type="datetime1">
               <a:rPr lang="en-GB" smtClean="0"/>
-              <a:t>24/10/2025</a:t>
+              <a:t>09/10/2026</a:t>
             </a:fld>
             <a:endParaRPr lang="en-GB"/>
           </a:p>
@@ -11581,7 +11545,7 @@
           <a:p>
             <a:fld id="{14886266-2C97-40F5-912B-07D12A130812}" type="datetime1">
               <a:rPr lang="en-GB" smtClean="0"/>
-              <a:t>24/10/2025</a:t>
+              <a:t>09/10/2026</a:t>
             </a:fld>
             <a:endParaRPr lang="en-GB"/>
           </a:p>
@@ -11980,7 +11944,7 @@
           <a:p>
             <a:fld id="{8BF87A05-28A2-4D5C-9314-4E24310DC8C5}" type="datetime1">
               <a:rPr lang="en-GB" smtClean="0"/>
-              <a:t>24/10/2025</a:t>
+              <a:t>09/10/2026</a:t>
             </a:fld>
             <a:endParaRPr lang="en-GB"/>
           </a:p>
@@ -12778,7 +12742,7 @@
           <a:p>
             <a:fld id="{0C9FB247-0CD0-490C-8985-7FA25D828C39}" type="datetime1">
               <a:rPr lang="en-GB" smtClean="0"/>
-              <a:t>24/10/2025</a:t>
+              <a:t>09/10/2026</a:t>
             </a:fld>
             <a:endParaRPr lang="en-GB"/>
           </a:p>
@@ -13382,7 +13346,7 @@
           <a:p>
             <a:fld id="{B9447BCD-73D3-4074-8F89-A63EBDAB5392}" type="datetime1">
               <a:rPr lang="en-GB" smtClean="0"/>
-              <a:t>24/10/2025</a:t>
+              <a:t>09/10/2026</a:t>
             </a:fld>
             <a:endParaRPr lang="en-GB"/>
           </a:p>
@@ -13976,7 +13940,7 @@
           <a:p>
             <a:fld id="{E21CF59D-EA4F-4257-B0EF-67EAAE11D561}" type="datetime1">
               <a:rPr lang="en-GB" smtClean="0"/>
-              <a:t>24/10/2025</a:t>
+              <a:t>09/10/2026</a:t>
             </a:fld>
             <a:endParaRPr lang="en-GB"/>
           </a:p>
@@ -14313,7 +14277,7 @@
           <a:p>
             <a:fld id="{486A662D-656A-469D-A081-72B4336EA861}" type="datetime1">
               <a:rPr lang="en-GB" smtClean="0"/>
-              <a:t>24/10/2025</a:t>
+              <a:t>09/10/2026</a:t>
             </a:fld>
             <a:endParaRPr lang="en-GB"/>
           </a:p>
@@ -14652,7 +14616,7 @@
           <a:p>
             <a:fld id="{5F0B848B-AEA3-4E1A-BA23-5322A0E3AB28}" type="datetime1">
               <a:rPr lang="en-GB" smtClean="0"/>
-              <a:t>24/10/2025</a:t>
+              <a:t>09/10/2026</a:t>
             </a:fld>
             <a:endParaRPr lang="en-GB"/>
           </a:p>
@@ -14981,7 +14945,7 @@
           <a:p>
             <a:fld id="{5E457192-AE0E-4DF4-B16D-BB35B6DA78DE}" type="datetime1">
               <a:rPr lang="en-GB" smtClean="0"/>
-              <a:t>24/10/2025</a:t>
+              <a:t>09/10/2026</a:t>
             </a:fld>
             <a:endParaRPr lang="en-GB"/>
           </a:p>
@@ -15318,7 +15282,7 @@
           <a:p>
             <a:fld id="{7EABDF07-61C4-42D9-8509-3F72B6359C53}" type="datetime1">
               <a:rPr lang="en-GB" smtClean="0"/>
-              <a:t>24/10/2025</a:t>
+              <a:t>09/10/2026</a:t>
             </a:fld>
             <a:endParaRPr lang="en-GB"/>
           </a:p>
@@ -15657,7 +15621,7 @@
           <a:p>
             <a:fld id="{BEFD1FC1-8A37-40E2-9C66-80F7ED708F45}" type="datetime1">
               <a:rPr lang="en-GB" smtClean="0"/>
-              <a:t>24/10/2025</a:t>
+              <a:t>09/10/2026</a:t>
             </a:fld>
             <a:endParaRPr lang="en-GB"/>
           </a:p>
@@ -15986,7 +15950,7 @@
           <a:p>
             <a:fld id="{B30B8B7E-2DF8-4625-8F01-E5E060B907D1}" type="datetime1">
               <a:rPr lang="en-GB" smtClean="0"/>
-              <a:t>24/10/2025</a:t>
+              <a:t>09/10/2026</a:t>
             </a:fld>
             <a:endParaRPr lang="en-GB"/>
           </a:p>
@@ -16224,7 +16188,7 @@
           <a:p>
             <a:fld id="{5D89B4C9-A314-4F5C-98E0-402B29B15E15}" type="datetime1">
               <a:rPr lang="en-GB" smtClean="0"/>
-              <a:t>24/10/2025</a:t>
+              <a:t>09/10/2026</a:t>
             </a:fld>
             <a:endParaRPr lang="en-GB"/>
           </a:p>
@@ -16660,7 +16624,7 @@
           <a:p>
             <a:fld id="{3F45AF60-822B-410F-B197-E75F6DF60431}" type="datetime1">
               <a:rPr lang="en-GB" smtClean="0"/>
-              <a:t>24/10/2025</a:t>
+              <a:t>09/10/2026</a:t>
             </a:fld>
             <a:endParaRPr lang="en-GB"/>
           </a:p>
@@ -17198,7 +17162,7 @@
           <a:p>
             <a:fld id="{7D467740-3B8F-41A3-8EA5-B8534F13C3B3}" type="datetime1">
               <a:rPr lang="en-GB" smtClean="0"/>
-              <a:t>24/10/2025</a:t>
+              <a:t>09/10/2026</a:t>
             </a:fld>
             <a:endParaRPr lang="en-GB"/>
           </a:p>
@@ -17477,7 +17441,7 @@
           <a:p>
             <a:fld id="{79B30FC3-1846-4B2D-82D3-2C756BE81694}" type="datetime1">
               <a:rPr lang="en-GB" smtClean="0"/>
-              <a:t>24/10/2025</a:t>
+              <a:t>09/10/2026</a:t>
             </a:fld>
             <a:endParaRPr lang="en-GB"/>
           </a:p>
@@ -17762,7 +17726,7 @@
           <a:p>
             <a:fld id="{5F205A5F-52AF-4AB3-B9BB-AD7956A299A1}" type="datetime1">
               <a:rPr lang="en-GB" smtClean="0"/>
-              <a:t>24/10/2025</a:t>
+              <a:t>09/10/2026</a:t>
             </a:fld>
             <a:endParaRPr lang="en-GB"/>
           </a:p>
@@ -18055,7 +18019,7 @@
           <a:p>
             <a:fld id="{99E6DF59-4026-4993-9254-8E1AEBF6802D}" type="datetime1">
               <a:rPr lang="en-GB" smtClean="0"/>
-              <a:t>24/10/2025</a:t>
+              <a:t>09/10/2026</a:t>
             </a:fld>
             <a:endParaRPr lang="en-GB"/>
           </a:p>
@@ -18472,7 +18436,7 @@
           <a:p>
             <a:fld id="{A34CE715-D1A7-49CE-972D-F2AE35069195}" type="datetime1">
               <a:rPr lang="en-GB" smtClean="0"/>
-              <a:t>24/10/2025</a:t>
+              <a:t>09/10/2026</a:t>
             </a:fld>
             <a:endParaRPr lang="en-GB" dirty="0"/>
           </a:p>
@@ -19260,7 +19224,7 @@
           <a:p>
             <a:fld id="{A6B0798C-C737-427A-8621-7CD88B6BE285}" type="datetime1">
               <a:rPr lang="en-GB" smtClean="0"/>
-              <a:t>24/10/2025</a:t>
+              <a:t>09/10/2026</a:t>
             </a:fld>
             <a:endParaRPr lang="en-GB"/>
           </a:p>
@@ -19512,7 +19476,7 @@
           <a:p>
             <a:fld id="{F3D28C7B-1560-4AC5-A729-2BF07782DDF5}" type="datetime1">
               <a:rPr lang="en-GB" smtClean="0"/>
-              <a:t>24/10/2025</a:t>
+              <a:t>09/10/2026</a:t>
             </a:fld>
             <a:endParaRPr lang="en-GB"/>
           </a:p>
@@ -19858,7 +19822,7 @@
           <a:p>
             <a:fld id="{B7813F7E-A2E2-45C6-9A08-61CC46C144DA}" type="datetime1">
               <a:rPr lang="en-GB" smtClean="0"/>
-              <a:t>24/10/2025</a:t>
+              <a:t>09/10/2026</a:t>
             </a:fld>
             <a:endParaRPr lang="en-GB"/>
           </a:p>
@@ -20028,7 +19992,7 @@
           <a:p>
             <a:fld id="{6B47E44B-A582-45D4-96C1-2E005F574EF9}" type="datetime1">
               <a:rPr lang="en-GB" smtClean="0"/>
-              <a:t>24/10/2025</a:t>
+              <a:t>09/10/2026</a:t>
             </a:fld>
             <a:endParaRPr lang="en-GB"/>
           </a:p>
@@ -20399,7 +20363,7 @@
           <a:p>
             <a:fld id="{D8A4A9E9-BC15-4B2A-85BE-31A72AB693BC}" type="datetime1">
               <a:rPr lang="en-GB" smtClean="0"/>
-              <a:t>24/10/2025</a:t>
+              <a:t>09/10/2026</a:t>
             </a:fld>
             <a:endParaRPr lang="en-GB"/>
           </a:p>
@@ -20567,26 +20531,8 @@
             </a:pPr>
             <a:r>
               <a:rPr lang="en-GB" sz="2600" dirty="0"/>
-              <a:t>The link </a:t>
-            </a:r>
-            <a:r>
-              <a:rPr lang="en-GB" sz="2600"/>
-              <a:t>is </a:t>
-            </a:r>
-            <a:r>
-              <a:rPr lang="en-GB" sz="2600" u="sng">
-                <a:solidFill>
-                  <a:srgbClr val="0563C1"/>
-                </a:solidFill>
-                <a:hlinkClick r:id="rId3"/>
-              </a:rPr>
-              <a:t>https://ecri.short.gy/feedback-rcds</a:t>
-            </a:r>
-            <a:endParaRPr lang="en-GB" sz="2600" u="sng">
-              <a:solidFill>
-                <a:srgbClr val="0563C1"/>
-              </a:solidFill>
-            </a:endParaRPr>
+              <a:t>The link is You should also have received an email with this link</a:t>
+            </a:r>
           </a:p>
           <a:p>
             <a:pPr marL="457200" lvl="1" indent="-457200">
@@ -20594,20 +20540,6 @@
               <a:buChar char="•"/>
             </a:pPr>
             <a:r>
-              <a:rPr lang="en-GB" sz="2600"/>
-              <a:t>You </a:t>
-            </a:r>
-            <a:r>
-              <a:rPr lang="en-GB" sz="2600" dirty="0"/>
-              <a:t>should also have received an email with this link</a:t>
-            </a:r>
-          </a:p>
-          <a:p>
-            <a:pPr marL="457200" lvl="1" indent="-457200">
-              <a:buFont typeface="Arial" panose="020B0604020202020204" pitchFamily="34" charset="0"/>
-              <a:buChar char="•"/>
-            </a:pPr>
-            <a:r>
               <a:rPr lang="en-GB" sz="2600" dirty="0"/>
               <a:t>This helps us improve the class for future students</a:t>
             </a:r>
@@ -20619,10 +20551,10 @@
       </p:sp>
       <p:pic>
         <p:nvPicPr>
-          <p:cNvPr id="10" name="Picture 9" descr="A qr code on a white background&#10;&#10;AI-generated content may be incorrect.">
-            <a:extLst>
-              <a:ext uri="{FF2B5EF4-FFF2-40B4-BE49-F238E27FC236}">
-                <a16:creationId xmlns:a16="http://schemas.microsoft.com/office/drawing/2014/main" id="{8DB0FD8D-5DA8-6F79-6B1A-9EDD19CA97C2}"/>
+          <p:cNvPr id="5" name="Picture 4">
+            <a:extLst>
+              <a:ext uri="{FF2B5EF4-FFF2-40B4-BE49-F238E27FC236}">
+                <a16:creationId xmlns:a16="http://schemas.microsoft.com/office/drawing/2014/main" id="{F0AE690E-1C15-9EE4-489B-47174A7853A6}"/>
               </a:ext>
             </a:extLst>
           </p:cNvPr>
@@ -20632,7 +20564,7 @@
           <p:nvPr/>
         </p:nvPicPr>
         <p:blipFill>
-          <a:blip r:embed="rId4">
+          <a:blip r:embed="rId3">
             <a:extLst>
               <a:ext uri="{28A0092B-C50C-407E-A947-70E740481C1C}">
                 <a14:useLocalDpi xmlns:a14="http://schemas.microsoft.com/office/drawing/2010/main" val="0"/>
@@ -20645,8 +20577,8 @@
         </p:blipFill>
         <p:spPr>
           <a:xfrm>
-            <a:off x="325800" y="928000"/>
-            <a:ext cx="5167745" cy="5167745"/>
+            <a:off x="325799" y="1008646"/>
+            <a:ext cx="5062913" cy="5062913"/>
           </a:xfrm>
           <a:prstGeom prst="rect">
             <a:avLst/>
